--- a/Python/Lesson 11 - Testing/Lesson 11 - Testing.pptx
+++ b/Python/Lesson 11 - Testing/Lesson 11 - Testing.pptx
@@ -753,6 +753,67 @@
             <p:ph type="sldImg"/>
           </p:nvPr>
         </p:nvSpPr>
+        <p:spPr/>
+      </p:sp>
+      <p:sp>
+        <p:nvSpPr>
+          <p:cNvPr id="3" name="Notes Placeholder 2"/>
+          <p:cNvSpPr>
+            <a:spLocks noGrp="1"/>
+          </p:cNvSpPr>
+          <p:nvPr>
+            <p:ph type="body" idx="1"/>
+          </p:nvPr>
+        </p:nvSpPr>
+        <p:spPr/>
+        <p:txBody>
+          <a:bodyPr/>
+          <a:lstStyle/>
+          <a:p>
+            <a:endParaRPr lang="en-US" dirty="0"/>
+          </a:p>
+        </p:txBody>
+      </p:sp>
+    </p:spTree>
+    <p:extLst>
+      <p:ext uri="{BB962C8B-B14F-4D97-AF65-F5344CB8AC3E}">
+        <p14:creationId xmlns:p14="http://schemas.microsoft.com/office/powerpoint/2010/main" val="4182280044"/>
+      </p:ext>
+    </p:extLst>
+  </p:cSld>
+  <p:clrMapOvr>
+    <a:masterClrMapping/>
+  </p:clrMapOvr>
+</p:notes>
+</file>
+
+<file path=ppt/notesSlides/notesSlide10.xml><?xml version="1.0" encoding="utf-8"?>
+<p:notes xmlns:a="http://schemas.openxmlformats.org/drawingml/2006/main" xmlns:r="http://schemas.openxmlformats.org/officeDocument/2006/relationships" xmlns:p="http://schemas.openxmlformats.org/presentationml/2006/main">
+  <p:cSld>
+    <p:spTree>
+      <p:nvGrpSpPr>
+        <p:cNvPr id="1" name=""/>
+        <p:cNvGrpSpPr/>
+        <p:nvPr/>
+      </p:nvGrpSpPr>
+      <p:grpSpPr>
+        <a:xfrm>
+          <a:off x="0" y="0"/>
+          <a:ext cx="0" cy="0"/>
+          <a:chOff x="0" y="0"/>
+          <a:chExt cx="0" cy="0"/>
+        </a:xfrm>
+      </p:grpSpPr>
+      <p:sp>
+        <p:nvSpPr>
+          <p:cNvPr id="2" name="Slide Image Placeholder 1"/>
+          <p:cNvSpPr>
+            <a:spLocks noGrp="1" noRot="1" noChangeAspect="1"/>
+          </p:cNvSpPr>
+          <p:nvPr>
+            <p:ph type="sldImg"/>
+          </p:nvPr>
+        </p:nvSpPr>
         <p:spPr>
           <a:xfrm>
             <a:off x="381000" y="685800"/>
@@ -777,7 +838,7 @@
           <a:p>
             <a:r>
               <a:rPr lang="en-US" dirty="0"/>
-              <a:t>How would you write “given, when, then” for the code on the right?</a:t>
+              <a:t>Fixtures are cached but side effects are not kept</a:t>
             </a:r>
           </a:p>
         </p:txBody>
@@ -785,7 +846,142 @@
     </p:spTree>
     <p:extLst>
       <p:ext uri="{BB962C8B-B14F-4D97-AF65-F5344CB8AC3E}">
-        <p14:creationId xmlns:p14="http://schemas.microsoft.com/office/powerpoint/2010/main" val="2591244821"/>
+        <p14:creationId xmlns:p14="http://schemas.microsoft.com/office/powerpoint/2010/main" val="7540620"/>
+      </p:ext>
+    </p:extLst>
+  </p:cSld>
+  <p:clrMapOvr>
+    <a:masterClrMapping/>
+  </p:clrMapOvr>
+</p:notes>
+</file>
+
+<file path=ppt/notesSlides/notesSlide11.xml><?xml version="1.0" encoding="utf-8"?>
+<p:notes xmlns:a="http://schemas.openxmlformats.org/drawingml/2006/main" xmlns:r="http://schemas.openxmlformats.org/officeDocument/2006/relationships" xmlns:p="http://schemas.openxmlformats.org/presentationml/2006/main">
+  <p:cSld>
+    <p:spTree>
+      <p:nvGrpSpPr>
+        <p:cNvPr id="1" name=""/>
+        <p:cNvGrpSpPr/>
+        <p:nvPr/>
+      </p:nvGrpSpPr>
+      <p:grpSpPr>
+        <a:xfrm>
+          <a:off x="0" y="0"/>
+          <a:ext cx="0" cy="0"/>
+          <a:chOff x="0" y="0"/>
+          <a:chExt cx="0" cy="0"/>
+        </a:xfrm>
+      </p:grpSpPr>
+      <p:sp>
+        <p:nvSpPr>
+          <p:cNvPr id="2" name="Slide Image Placeholder 1"/>
+          <p:cNvSpPr>
+            <a:spLocks noGrp="1" noRot="1" noChangeAspect="1"/>
+          </p:cNvSpPr>
+          <p:nvPr>
+            <p:ph type="sldImg"/>
+          </p:nvPr>
+        </p:nvSpPr>
+        <p:spPr>
+          <a:xfrm>
+            <a:off x="381000" y="685800"/>
+            <a:ext cx="6096000" cy="3429000"/>
+          </a:xfrm>
+        </p:spPr>
+      </p:sp>
+      <p:sp>
+        <p:nvSpPr>
+          <p:cNvPr id="3" name="Notes Placeholder 2"/>
+          <p:cNvSpPr>
+            <a:spLocks noGrp="1"/>
+          </p:cNvSpPr>
+          <p:nvPr>
+            <p:ph type="body" idx="1"/>
+          </p:nvPr>
+        </p:nvSpPr>
+        <p:spPr/>
+        <p:txBody>
+          <a:bodyPr/>
+          <a:lstStyle/>
+          <a:p>
+            <a:r>
+              <a:rPr lang="en-US" dirty="0"/>
+              <a:t>This fixture is shared and not created multiple times</a:t>
+            </a:r>
+          </a:p>
+        </p:txBody>
+      </p:sp>
+    </p:spTree>
+    <p:extLst>
+      <p:ext uri="{BB962C8B-B14F-4D97-AF65-F5344CB8AC3E}">
+        <p14:creationId xmlns:p14="http://schemas.microsoft.com/office/powerpoint/2010/main" val="95827445"/>
+      </p:ext>
+    </p:extLst>
+  </p:cSld>
+  <p:clrMapOvr>
+    <a:masterClrMapping/>
+  </p:clrMapOvr>
+</p:notes>
+</file>
+
+<file path=ppt/notesSlides/notesSlide12.xml><?xml version="1.0" encoding="utf-8"?>
+<p:notes xmlns:a="http://schemas.openxmlformats.org/drawingml/2006/main" xmlns:r="http://schemas.openxmlformats.org/officeDocument/2006/relationships" xmlns:p="http://schemas.openxmlformats.org/presentationml/2006/main">
+  <p:cSld>
+    <p:spTree>
+      <p:nvGrpSpPr>
+        <p:cNvPr id="1" name=""/>
+        <p:cNvGrpSpPr/>
+        <p:nvPr/>
+      </p:nvGrpSpPr>
+      <p:grpSpPr>
+        <a:xfrm>
+          <a:off x="0" y="0"/>
+          <a:ext cx="0" cy="0"/>
+          <a:chOff x="0" y="0"/>
+          <a:chExt cx="0" cy="0"/>
+        </a:xfrm>
+      </p:grpSpPr>
+      <p:sp>
+        <p:nvSpPr>
+          <p:cNvPr id="2" name="Slide Image Placeholder 1"/>
+          <p:cNvSpPr>
+            <a:spLocks noGrp="1" noRot="1" noChangeAspect="1"/>
+          </p:cNvSpPr>
+          <p:nvPr>
+            <p:ph type="sldImg"/>
+          </p:nvPr>
+        </p:nvSpPr>
+        <p:spPr>
+          <a:xfrm>
+            <a:off x="381000" y="685800"/>
+            <a:ext cx="6096000" cy="3429000"/>
+          </a:xfrm>
+        </p:spPr>
+      </p:sp>
+      <p:sp>
+        <p:nvSpPr>
+          <p:cNvPr id="3" name="Notes Placeholder 2"/>
+          <p:cNvSpPr>
+            <a:spLocks noGrp="1"/>
+          </p:cNvSpPr>
+          <p:nvPr>
+            <p:ph type="body" idx="1"/>
+          </p:nvPr>
+        </p:nvSpPr>
+        <p:spPr/>
+        <p:txBody>
+          <a:bodyPr/>
+          <a:lstStyle/>
+          <a:p>
+            <a:endParaRPr lang="en-US" dirty="0"/>
+          </a:p>
+        </p:txBody>
+      </p:sp>
+    </p:spTree>
+    <p:extLst>
+      <p:ext uri="{BB962C8B-B14F-4D97-AF65-F5344CB8AC3E}">
+        <p14:creationId xmlns:p14="http://schemas.microsoft.com/office/powerpoint/2010/main" val="1525201746"/>
       </p:ext>
     </p:extLst>
   </p:cSld>
@@ -844,9 +1040,18 @@
           <a:bodyPr/>
           <a:lstStyle/>
           <a:p>
+            <a:pPr marL="158750" indent="0">
+              <a:buNone/>
+            </a:pPr>
+            <a:endParaRPr lang="en-US" dirty="0"/>
+          </a:p>
+          <a:p>
+            <a:pPr marL="158750" indent="0">
+              <a:buNone/>
+            </a:pPr>
             <a:r>
               <a:rPr lang="en-US" dirty="0"/>
-              <a:t>Line 36 of inventory.py might be "covered" but you need to be careful about the 'or' statement</a:t>
+              <a:t>Ensure we don’t break things, ensure new feature works, ensures any edge work (what the customer might try)</a:t>
             </a:r>
           </a:p>
         </p:txBody>
@@ -854,7 +1059,7 @@
     </p:spTree>
     <p:extLst>
       <p:ext uri="{BB962C8B-B14F-4D97-AF65-F5344CB8AC3E}">
-        <p14:creationId xmlns:p14="http://schemas.microsoft.com/office/powerpoint/2010/main" val="2776245140"/>
+        <p14:creationId xmlns:p14="http://schemas.microsoft.com/office/powerpoint/2010/main" val="2674295172"/>
       </p:ext>
     </p:extLst>
   </p:cSld>
@@ -913,9 +1118,27 @@
           <a:bodyPr/>
           <a:lstStyle/>
           <a:p>
+            <a:pPr marL="158750" indent="0">
+              <a:buNone/>
+            </a:pPr>
             <a:r>
               <a:rPr lang="en-US" dirty="0"/>
-              <a:t>https://docs.pytest.org/en/7.1.x/how-to/fixtures.html</a:t>
+              <a:t>Test driven development world, you write test cases first. </a:t>
+            </a:r>
+          </a:p>
+          <a:p>
+            <a:pPr marL="158750" indent="0">
+              <a:buNone/>
+            </a:pPr>
+            <a:endParaRPr lang="en-US" dirty="0"/>
+          </a:p>
+          <a:p>
+            <a:pPr marL="158750" indent="0">
+              <a:buNone/>
+            </a:pPr>
+            <a:r>
+              <a:rPr lang="en-US" dirty="0"/>
+              <a:t>Requirements to fulfill, write test case to ensure requirements are met, then write code until all test pass, then shift the code </a:t>
             </a:r>
           </a:p>
         </p:txBody>
@@ -923,7 +1146,7 @@
     </p:spTree>
     <p:extLst>
       <p:ext uri="{BB962C8B-B14F-4D97-AF65-F5344CB8AC3E}">
-        <p14:creationId xmlns:p14="http://schemas.microsoft.com/office/powerpoint/2010/main" val="1523025893"/>
+        <p14:creationId xmlns:p14="http://schemas.microsoft.com/office/powerpoint/2010/main" val="3920404172"/>
       </p:ext>
     </p:extLst>
   </p:cSld>
@@ -982,9 +1205,72 @@
           <a:bodyPr/>
           <a:lstStyle/>
           <a:p>
+            <a:pPr marL="158750" indent="0">
+              <a:buNone/>
+            </a:pPr>
             <a:r>
               <a:rPr lang="en-US" dirty="0"/>
-              <a:t>Fixtures are cached but side effects are not kept</a:t>
+              <a:t>Functional “Does the code do what we think it will do”</a:t>
+            </a:r>
+          </a:p>
+          <a:p>
+            <a:pPr marL="158750" indent="0">
+              <a:buNone/>
+            </a:pPr>
+            <a:endParaRPr lang="en-US" dirty="0"/>
+          </a:p>
+          <a:p>
+            <a:pPr marL="158750" indent="0">
+              <a:buNone/>
+            </a:pPr>
+            <a:r>
+              <a:rPr lang="en-US" dirty="0"/>
+              <a:t>Unit test – Test one unit (smallest entity of something), usually at function level</a:t>
+            </a:r>
+          </a:p>
+          <a:p>
+            <a:pPr marL="158750" indent="0">
+              <a:buNone/>
+            </a:pPr>
+            <a:endParaRPr lang="en-US" dirty="0"/>
+          </a:p>
+          <a:p>
+            <a:pPr marL="158750" indent="0">
+              <a:buNone/>
+            </a:pPr>
+            <a:r>
+              <a:rPr lang="en-US" dirty="0"/>
+              <a:t>Integration test – take a few units and seem if the code works together</a:t>
+            </a:r>
+          </a:p>
+          <a:p>
+            <a:pPr marL="158750" indent="0">
+              <a:buNone/>
+            </a:pPr>
+            <a:endParaRPr lang="en-US" dirty="0"/>
+          </a:p>
+          <a:p>
+            <a:pPr marL="158750" indent="0">
+              <a:buNone/>
+            </a:pPr>
+            <a:r>
+              <a:rPr lang="en-US" dirty="0"/>
+              <a:t>End-to-end – see if the whole workflow works properly</a:t>
+            </a:r>
+          </a:p>
+          <a:p>
+            <a:pPr marL="158750" indent="0">
+              <a:buNone/>
+            </a:pPr>
+            <a:endParaRPr lang="en-US" dirty="0"/>
+          </a:p>
+          <a:p>
+            <a:pPr marL="158750" indent="0">
+              <a:buNone/>
+            </a:pPr>
+            <a:r>
+              <a:rPr lang="en-US" dirty="0"/>
+              <a:t>Acceptance – put a user Infront of the process to confirm if this meet the requirements</a:t>
             </a:r>
           </a:p>
         </p:txBody>
@@ -992,7 +1278,7 @@
     </p:spTree>
     <p:extLst>
       <p:ext uri="{BB962C8B-B14F-4D97-AF65-F5344CB8AC3E}">
-        <p14:creationId xmlns:p14="http://schemas.microsoft.com/office/powerpoint/2010/main" val="7540620"/>
+        <p14:creationId xmlns:p14="http://schemas.microsoft.com/office/powerpoint/2010/main" val="3360351219"/>
       </p:ext>
     </p:extLst>
   </p:cSld>
@@ -1051,17 +1337,68 @@
           <a:bodyPr/>
           <a:lstStyle/>
           <a:p>
+            <a:pPr marL="158750" indent="0">
+              <a:buNone/>
+            </a:pPr>
+            <a:endParaRPr lang="en-US" dirty="0"/>
+          </a:p>
+          <a:p>
+            <a:pPr marL="158750" indent="0">
+              <a:buNone/>
+            </a:pPr>
             <a:r>
               <a:rPr lang="en-US" dirty="0"/>
-              <a:t>This fixture is shared and not created multiple times</a:t>
-            </a:r>
+              <a:t>Complete: You have everything needed to complete the test</a:t>
+            </a:r>
+          </a:p>
+          <a:p>
+            <a:pPr marL="158750" indent="0">
+              <a:buNone/>
+            </a:pPr>
+            <a:endParaRPr lang="en-US" dirty="0"/>
+          </a:p>
+          <a:p>
+            <a:pPr marL="158750" indent="0">
+              <a:buNone/>
+            </a:pPr>
+            <a:r>
+              <a:rPr lang="en-US" dirty="0"/>
+              <a:t>Independent: Don’t need anything else to run the test</a:t>
+            </a:r>
+          </a:p>
+          <a:p>
+            <a:pPr marL="158750" indent="0">
+              <a:buNone/>
+            </a:pPr>
+            <a:endParaRPr lang="en-US" dirty="0"/>
+          </a:p>
+          <a:p>
+            <a:pPr marL="158750" indent="0">
+              <a:buNone/>
+            </a:pPr>
+            <a:r>
+              <a:rPr lang="en-US" dirty="0"/>
+              <a:t>Reproducible: Should always get a pass or fail from the test</a:t>
+            </a:r>
+          </a:p>
+          <a:p>
+            <a:pPr marL="158750" indent="0">
+              <a:buNone/>
+            </a:pPr>
+            <a:endParaRPr lang="en-US" dirty="0"/>
+          </a:p>
+          <a:p>
+            <a:pPr marL="158750" indent="0">
+              <a:buNone/>
+            </a:pPr>
+            <a:endParaRPr lang="en-US" dirty="0"/>
           </a:p>
         </p:txBody>
       </p:sp>
     </p:spTree>
     <p:extLst>
       <p:ext uri="{BB962C8B-B14F-4D97-AF65-F5344CB8AC3E}">
-        <p14:creationId xmlns:p14="http://schemas.microsoft.com/office/powerpoint/2010/main" val="95827445"/>
+        <p14:creationId xmlns:p14="http://schemas.microsoft.com/office/powerpoint/2010/main" val="1471844649"/>
       </p:ext>
     </p:extLst>
   </p:cSld>
@@ -1120,6 +1457,24 @@
           <a:bodyPr/>
           <a:lstStyle/>
           <a:p>
+            <a:pPr marL="158750" indent="0">
+              <a:buNone/>
+            </a:pPr>
+            <a:r>
+              <a:rPr lang="en-US" dirty="0"/>
+              <a:t>We don’t only test successes, we must also test failures (as seen above)</a:t>
+            </a:r>
+          </a:p>
+          <a:p>
+            <a:pPr marL="158750" indent="0">
+              <a:buNone/>
+            </a:pPr>
+            <a:endParaRPr lang="en-US" dirty="0"/>
+          </a:p>
+          <a:p>
+            <a:pPr marL="158750" indent="0">
+              <a:buNone/>
+            </a:pPr>
             <a:endParaRPr lang="en-US" dirty="0"/>
           </a:p>
         </p:txBody>
@@ -1127,7 +1482,297 @@
     </p:spTree>
     <p:extLst>
       <p:ext uri="{BB962C8B-B14F-4D97-AF65-F5344CB8AC3E}">
-        <p14:creationId xmlns:p14="http://schemas.microsoft.com/office/powerpoint/2010/main" val="1525201746"/>
+        <p14:creationId xmlns:p14="http://schemas.microsoft.com/office/powerpoint/2010/main" val="1974836080"/>
+      </p:ext>
+    </p:extLst>
+  </p:cSld>
+  <p:clrMapOvr>
+    <a:masterClrMapping/>
+  </p:clrMapOvr>
+</p:notes>
+</file>
+
+<file path=ppt/notesSlides/notesSlide7.xml><?xml version="1.0" encoding="utf-8"?>
+<p:notes xmlns:a="http://schemas.openxmlformats.org/drawingml/2006/main" xmlns:r="http://schemas.openxmlformats.org/officeDocument/2006/relationships" xmlns:p="http://schemas.openxmlformats.org/presentationml/2006/main">
+  <p:cSld>
+    <p:spTree>
+      <p:nvGrpSpPr>
+        <p:cNvPr id="1" name=""/>
+        <p:cNvGrpSpPr/>
+        <p:nvPr/>
+      </p:nvGrpSpPr>
+      <p:grpSpPr>
+        <a:xfrm>
+          <a:off x="0" y="0"/>
+          <a:ext cx="0" cy="0"/>
+          <a:chOff x="0" y="0"/>
+          <a:chExt cx="0" cy="0"/>
+        </a:xfrm>
+      </p:grpSpPr>
+      <p:sp>
+        <p:nvSpPr>
+          <p:cNvPr id="2" name="Slide Image Placeholder 1"/>
+          <p:cNvSpPr>
+            <a:spLocks noGrp="1" noRot="1" noChangeAspect="1"/>
+          </p:cNvSpPr>
+          <p:nvPr>
+            <p:ph type="sldImg"/>
+          </p:nvPr>
+        </p:nvSpPr>
+        <p:spPr>
+          <a:xfrm>
+            <a:off x="381000" y="685800"/>
+            <a:ext cx="6096000" cy="3429000"/>
+          </a:xfrm>
+        </p:spPr>
+      </p:sp>
+      <p:sp>
+        <p:nvSpPr>
+          <p:cNvPr id="3" name="Notes Placeholder 2"/>
+          <p:cNvSpPr>
+            <a:spLocks noGrp="1"/>
+          </p:cNvSpPr>
+          <p:nvPr>
+            <p:ph type="body" idx="1"/>
+          </p:nvPr>
+        </p:nvSpPr>
+        <p:spPr/>
+        <p:txBody>
+          <a:bodyPr/>
+          <a:lstStyle/>
+          <a:p>
+            <a:r>
+              <a:rPr lang="en-US" dirty="0"/>
+              <a:t>How would you write “given, when, then” for the code on the right?</a:t>
+            </a:r>
+          </a:p>
+          <a:p>
+            <a:endParaRPr lang="en-US" dirty="0"/>
+          </a:p>
+          <a:p>
+            <a:endParaRPr lang="en-US" dirty="0"/>
+          </a:p>
+          <a:p>
+            <a:pPr marL="158750" indent="0">
+              <a:buNone/>
+            </a:pPr>
+            <a:r>
+              <a:rPr lang="en-US" dirty="0"/>
+              <a:t>** We write code to validate our code **</a:t>
+            </a:r>
+          </a:p>
+          <a:p>
+            <a:pPr marL="158750" indent="0">
+              <a:buNone/>
+            </a:pPr>
+            <a:endParaRPr lang="en-US" dirty="0"/>
+          </a:p>
+          <a:p>
+            <a:pPr marL="158750" indent="0">
+              <a:buNone/>
+            </a:pPr>
+            <a:r>
+              <a:rPr lang="en-US" dirty="0"/>
+              <a:t>We will use the </a:t>
+            </a:r>
+            <a:r>
+              <a:rPr lang="en-US" dirty="0" err="1"/>
+              <a:t>Pytest</a:t>
+            </a:r>
+            <a:r>
+              <a:rPr lang="en-US" dirty="0"/>
+              <a:t> feature/function</a:t>
+            </a:r>
+          </a:p>
+          <a:p>
+            <a:pPr marL="158750" indent="0">
+              <a:buNone/>
+            </a:pPr>
+            <a:endParaRPr lang="en-US" dirty="0"/>
+          </a:p>
+          <a:p>
+            <a:pPr marL="158750" indent="0">
+              <a:buNone/>
+            </a:pPr>
+            <a:r>
+              <a:rPr lang="en-US" dirty="0"/>
+              <a:t>You can add a message to your assert statement (assert false, “Your code failed, you should stop coding.”</a:t>
+            </a:r>
+          </a:p>
+          <a:p>
+            <a:pPr marL="158750" indent="0">
+              <a:buNone/>
+            </a:pPr>
+            <a:endParaRPr lang="en-US" dirty="0"/>
+          </a:p>
+          <a:p>
+            <a:pPr marL="158750" indent="0">
+              <a:buNone/>
+            </a:pPr>
+            <a:r>
+              <a:rPr lang="en-US" dirty="0"/>
+              <a:t>Assert statements only show true and false. </a:t>
+            </a:r>
+          </a:p>
+          <a:p>
+            <a:pPr marL="158750" indent="0">
+              <a:buNone/>
+            </a:pPr>
+            <a:endParaRPr lang="en-US" dirty="0"/>
+          </a:p>
+          <a:p>
+            <a:pPr marL="158750" indent="0">
+              <a:buNone/>
+            </a:pPr>
+            <a:r>
+              <a:rPr lang="en-US" dirty="0"/>
+              <a:t>If the assert statements is true, it will continue to run the code. </a:t>
+            </a:r>
+          </a:p>
+        </p:txBody>
+      </p:sp>
+    </p:spTree>
+    <p:extLst>
+      <p:ext uri="{BB962C8B-B14F-4D97-AF65-F5344CB8AC3E}">
+        <p14:creationId xmlns:p14="http://schemas.microsoft.com/office/powerpoint/2010/main" val="2591244821"/>
+      </p:ext>
+    </p:extLst>
+  </p:cSld>
+  <p:clrMapOvr>
+    <a:masterClrMapping/>
+  </p:clrMapOvr>
+</p:notes>
+</file>
+
+<file path=ppt/notesSlides/notesSlide8.xml><?xml version="1.0" encoding="utf-8"?>
+<p:notes xmlns:a="http://schemas.openxmlformats.org/drawingml/2006/main" xmlns:r="http://schemas.openxmlformats.org/officeDocument/2006/relationships" xmlns:p="http://schemas.openxmlformats.org/presentationml/2006/main">
+  <p:cSld>
+    <p:spTree>
+      <p:nvGrpSpPr>
+        <p:cNvPr id="1" name=""/>
+        <p:cNvGrpSpPr/>
+        <p:nvPr/>
+      </p:nvGrpSpPr>
+      <p:grpSpPr>
+        <a:xfrm>
+          <a:off x="0" y="0"/>
+          <a:ext cx="0" cy="0"/>
+          <a:chOff x="0" y="0"/>
+          <a:chExt cx="0" cy="0"/>
+        </a:xfrm>
+      </p:grpSpPr>
+      <p:sp>
+        <p:nvSpPr>
+          <p:cNvPr id="2" name="Slide Image Placeholder 1"/>
+          <p:cNvSpPr>
+            <a:spLocks noGrp="1" noRot="1" noChangeAspect="1"/>
+          </p:cNvSpPr>
+          <p:nvPr>
+            <p:ph type="sldImg"/>
+          </p:nvPr>
+        </p:nvSpPr>
+        <p:spPr>
+          <a:xfrm>
+            <a:off x="381000" y="685800"/>
+            <a:ext cx="6096000" cy="3429000"/>
+          </a:xfrm>
+        </p:spPr>
+      </p:sp>
+      <p:sp>
+        <p:nvSpPr>
+          <p:cNvPr id="3" name="Notes Placeholder 2"/>
+          <p:cNvSpPr>
+            <a:spLocks noGrp="1"/>
+          </p:cNvSpPr>
+          <p:nvPr>
+            <p:ph type="body" idx="1"/>
+          </p:nvPr>
+        </p:nvSpPr>
+        <p:spPr/>
+        <p:txBody>
+          <a:bodyPr/>
+          <a:lstStyle/>
+          <a:p>
+            <a:r>
+              <a:rPr lang="en-US" dirty="0"/>
+              <a:t>Line 36 of inventory.py might be "covered" but you need to be careful about the 'or' statement</a:t>
+            </a:r>
+          </a:p>
+        </p:txBody>
+      </p:sp>
+    </p:spTree>
+    <p:extLst>
+      <p:ext uri="{BB962C8B-B14F-4D97-AF65-F5344CB8AC3E}">
+        <p14:creationId xmlns:p14="http://schemas.microsoft.com/office/powerpoint/2010/main" val="2776245140"/>
+      </p:ext>
+    </p:extLst>
+  </p:cSld>
+  <p:clrMapOvr>
+    <a:masterClrMapping/>
+  </p:clrMapOvr>
+</p:notes>
+</file>
+
+<file path=ppt/notesSlides/notesSlide9.xml><?xml version="1.0" encoding="utf-8"?>
+<p:notes xmlns:a="http://schemas.openxmlformats.org/drawingml/2006/main" xmlns:r="http://schemas.openxmlformats.org/officeDocument/2006/relationships" xmlns:p="http://schemas.openxmlformats.org/presentationml/2006/main">
+  <p:cSld>
+    <p:spTree>
+      <p:nvGrpSpPr>
+        <p:cNvPr id="1" name=""/>
+        <p:cNvGrpSpPr/>
+        <p:nvPr/>
+      </p:nvGrpSpPr>
+      <p:grpSpPr>
+        <a:xfrm>
+          <a:off x="0" y="0"/>
+          <a:ext cx="0" cy="0"/>
+          <a:chOff x="0" y="0"/>
+          <a:chExt cx="0" cy="0"/>
+        </a:xfrm>
+      </p:grpSpPr>
+      <p:sp>
+        <p:nvSpPr>
+          <p:cNvPr id="2" name="Slide Image Placeholder 1"/>
+          <p:cNvSpPr>
+            <a:spLocks noGrp="1" noRot="1" noChangeAspect="1"/>
+          </p:cNvSpPr>
+          <p:nvPr>
+            <p:ph type="sldImg"/>
+          </p:nvPr>
+        </p:nvSpPr>
+        <p:spPr>
+          <a:xfrm>
+            <a:off x="381000" y="685800"/>
+            <a:ext cx="6096000" cy="3429000"/>
+          </a:xfrm>
+        </p:spPr>
+      </p:sp>
+      <p:sp>
+        <p:nvSpPr>
+          <p:cNvPr id="3" name="Notes Placeholder 2"/>
+          <p:cNvSpPr>
+            <a:spLocks noGrp="1"/>
+          </p:cNvSpPr>
+          <p:nvPr>
+            <p:ph type="body" idx="1"/>
+          </p:nvPr>
+        </p:nvSpPr>
+        <p:spPr/>
+        <p:txBody>
+          <a:bodyPr/>
+          <a:lstStyle/>
+          <a:p>
+            <a:r>
+              <a:rPr lang="en-US" dirty="0"/>
+              <a:t>https://docs.pytest.org/en/7.1.x/how-to/fixtures.html</a:t>
+            </a:r>
+          </a:p>
+        </p:txBody>
+      </p:sp>
+    </p:spTree>
+    <p:extLst>
+      <p:ext uri="{BB962C8B-B14F-4D97-AF65-F5344CB8AC3E}">
+        <p14:creationId xmlns:p14="http://schemas.microsoft.com/office/powerpoint/2010/main" val="1523025893"/>
       </p:ext>
     </p:extLst>
   </p:cSld>
@@ -1185,7 +1830,7 @@
           <a:p>
             <a:fld id="{7A3E0868-4E26-4CDC-8A56-D70E2D8B12FE}" type="datetime3">
               <a:rPr lang="en-US" smtClean="0"/>
-              <a:t>23 June 2026</a:t>
+              <a:t>5 August 2026</a:t>
             </a:fld>
             <a:endParaRPr lang="en-US"/>
           </a:p>
@@ -3764,7 +4409,7 @@
           <a:p>
             <a:fld id="{A7B8021B-6105-4216-96FC-94348F216D0E}" type="datetime3">
               <a:rPr lang="en-US" smtClean="0"/>
-              <a:t>23 June 2026</a:t>
+              <a:t>5 August 2026</a:t>
             </a:fld>
             <a:endParaRPr lang="en-US"/>
           </a:p>
@@ -5485,7 +6130,7 @@
           <a:p>
             <a:fld id="{5D27CFAB-73E6-44A8-B862-B3306344E3F2}" type="datetime3">
               <a:rPr lang="en-US" smtClean="0"/>
-              <a:t>23 June 2026</a:t>
+              <a:t>5 August 2026</a:t>
             </a:fld>
             <a:endParaRPr lang="en-US"/>
           </a:p>
@@ -7299,7 +7944,7 @@
           <a:p>
             <a:fld id="{A9B2E784-A5F5-4301-881B-94AC8DBF9DED}" type="datetime3">
               <a:rPr lang="en-US" smtClean="0"/>
-              <a:t>23 June 2026</a:t>
+              <a:t>5 August 2026</a:t>
             </a:fld>
             <a:endParaRPr lang="en-US"/>
           </a:p>
@@ -7481,7 +8126,7 @@
           <a:p>
             <a:fld id="{18EAB3A5-9E92-4BB9-8F22-9632B4FBEDBA}" type="datetime3">
               <a:rPr lang="en-US" smtClean="0"/>
-              <a:t>23 June 2026</a:t>
+              <a:t>5 August 2026</a:t>
             </a:fld>
             <a:endParaRPr lang="en-US"/>
           </a:p>
@@ -7711,7 +8356,7 @@
           <a:p>
             <a:fld id="{40923810-5FB2-48C9-96CA-1DE2C4773142}" type="datetime3">
               <a:rPr lang="en-US" smtClean="0"/>
-              <a:t>23 June 2026</a:t>
+              <a:t>5 August 2026</a:t>
             </a:fld>
             <a:endParaRPr lang="en-US"/>
           </a:p>
@@ -8010,7 +8655,7 @@
           <a:p>
             <a:fld id="{E50EFF4B-86EB-42FB-93EA-7D8F9CB2466F}" type="datetime3">
               <a:rPr lang="en-US" smtClean="0"/>
-              <a:t>23 June 2026</a:t>
+              <a:t>5 August 2026</a:t>
             </a:fld>
             <a:endParaRPr lang="en-US"/>
           </a:p>
@@ -8640,7 +9285,7 @@
           <a:p>
             <a:fld id="{FB14FC24-E041-45E9-9A72-E5755A86890F}" type="datetime3">
               <a:rPr lang="en-US" smtClean="0"/>
-              <a:t>23 June 2026</a:t>
+              <a:t>5 August 2026</a:t>
             </a:fld>
             <a:endParaRPr lang="en-US"/>
           </a:p>
@@ -9527,7 +10172,7 @@
           <a:p>
             <a:fld id="{98A19125-94A7-4474-858C-FD9C4ABE9DDA}" type="datetime3">
               <a:rPr lang="en-US" smtClean="0"/>
-              <a:t>23 June 2026</a:t>
+              <a:t>5 August 2026</a:t>
             </a:fld>
             <a:endParaRPr lang="en-US"/>
           </a:p>
@@ -10666,7 +11311,7 @@
           <a:p>
             <a:fld id="{3BA0343D-C8D8-43CE-BB79-50DEA219DB07}" type="datetime3">
               <a:rPr lang="en-US" smtClean="0"/>
-              <a:t>23 June 2026</a:t>
+              <a:t>5 August 2026</a:t>
             </a:fld>
             <a:endParaRPr lang="en-US"/>
           </a:p>
@@ -10958,7 +11603,7 @@
           <a:p>
             <a:fld id="{453BD212-0B9F-4987-965F-AC83B2FC354F}" type="datetime3">
               <a:rPr lang="en-US" smtClean="0"/>
-              <a:t>23 June 2026</a:t>
+              <a:t>5 August 2026</a:t>
             </a:fld>
             <a:endParaRPr lang="en-US"/>
           </a:p>
@@ -11203,7 +11848,7 @@
           <a:p>
             <a:fld id="{6DDC931E-8CBE-4A3F-A034-9B6122C6DCDB}" type="datetime3">
               <a:rPr lang="en-US" smtClean="0"/>
-              <a:t>23 June 2026</a:t>
+              <a:t>5 August 2026</a:t>
             </a:fld>
             <a:endParaRPr lang="en-US"/>
           </a:p>
@@ -12981,7 +13626,7 @@
           <a:p>
             <a:fld id="{220AF9C2-5E8A-4308-AE6B-CA9B65007D0E}" type="datetime3">
               <a:rPr lang="en-US" smtClean="0"/>
-              <a:t>23 June 2026</a:t>
+              <a:t>5 August 2026</a:t>
             </a:fld>
             <a:endParaRPr lang="en-US"/>
           </a:p>
@@ -13297,7 +13942,7 @@
           <a:p>
             <a:fld id="{FF31E861-D2AF-431D-860B-DCF67C218052}" type="datetime3">
               <a:rPr lang="en-US" smtClean="0"/>
-              <a:t>23 June 2026</a:t>
+              <a:t>5 August 2026</a:t>
             </a:fld>
             <a:endParaRPr lang="en-US"/>
           </a:p>
@@ -13579,7 +14224,7 @@
           <a:p>
             <a:fld id="{D1DA25B2-AAF1-4C1F-AA38-12D5BFA7D4C8}" type="datetime3">
               <a:rPr lang="en-US" smtClean="0"/>
-              <a:t>23 June 2026</a:t>
+              <a:t>5 August 2026</a:t>
             </a:fld>
             <a:endParaRPr lang="en-US"/>
           </a:p>
@@ -13861,7 +14506,7 @@
           <a:p>
             <a:fld id="{A25C0F39-45D0-48E9-90B3-7FE8FCE561C8}" type="datetime3">
               <a:rPr lang="en-US" smtClean="0"/>
-              <a:t>23 June 2026</a:t>
+              <a:t>5 August 2026</a:t>
             </a:fld>
             <a:endParaRPr lang="en-US"/>
           </a:p>
@@ -14371,7 +15016,7 @@
           <a:p>
             <a:fld id="{9BAF1A3D-92FA-4F24-9781-74AFA516A230}" type="datetime3">
               <a:rPr lang="en-US" smtClean="0"/>
-              <a:t>23 June 2026</a:t>
+              <a:t>5 August 2026</a:t>
             </a:fld>
             <a:endParaRPr lang="en-US"/>
           </a:p>
@@ -14498,7 +15143,7 @@
           <a:p>
             <a:fld id="{5719C672-856D-4617-A693-8FE15749A9B7}" type="datetime3">
               <a:rPr lang="en-US" smtClean="0"/>
-              <a:t>23 June 2026</a:t>
+              <a:t>5 August 2026</a:t>
             </a:fld>
             <a:endParaRPr lang="en-US"/>
           </a:p>
@@ -14633,7 +15278,7 @@
           <a:p>
             <a:fld id="{5F6C764D-A39E-4C03-B161-E0BC66E8883B}" type="datetime3">
               <a:rPr lang="en-US" smtClean="0"/>
-              <a:t>23 June 2026</a:t>
+              <a:t>5 August 2026</a:t>
             </a:fld>
             <a:endParaRPr lang="en-US"/>
           </a:p>
@@ -14875,7 +15520,7 @@
           <a:p>
             <a:fld id="{6E3E33F9-20B7-4995-BE7D-165DBB597850}" type="datetime3">
               <a:rPr lang="en-US" smtClean="0"/>
-              <a:t>23 June 2026</a:t>
+              <a:t>5 August 2026</a:t>
             </a:fld>
             <a:endParaRPr lang="en-US"/>
           </a:p>
@@ -14988,7 +15633,7 @@
           <a:p>
             <a:fld id="{CD41C263-3501-4369-A962-62B6BF915CDE}" type="datetime3">
               <a:rPr lang="en-US" smtClean="0"/>
-              <a:t>23 June 2026</a:t>
+              <a:t>5 August 2026</a:t>
             </a:fld>
             <a:endParaRPr lang="en-US"/>
           </a:p>
@@ -15394,7 +16039,7 @@
           <a:p>
             <a:fld id="{B06F3EBE-B2E8-4992-9F00-9E4B44F057C0}" type="datetime3">
               <a:rPr lang="en-US" smtClean="0"/>
-              <a:t>23 June 2026</a:t>
+              <a:t>5 August 2026</a:t>
             </a:fld>
             <a:endParaRPr lang="en-US"/>
           </a:p>
@@ -15526,7 +16171,7 @@
           <a:p>
             <a:fld id="{D41656AB-D2E1-472E-8B95-0DF5C6E1D623}" type="datetime3">
               <a:rPr lang="en-US" smtClean="0"/>
-              <a:t>23 June 2026</a:t>
+              <a:t>5 August 2026</a:t>
             </a:fld>
             <a:endParaRPr lang="en-US"/>
           </a:p>
@@ -19676,7 +20321,7 @@
           <a:p>
             <a:fld id="{AD622D1A-DF83-41A8-85FF-04D90BF831D3}" type="datetime3">
               <a:rPr lang="en-US" smtClean="0"/>
-              <a:t>23 June 2026</a:t>
+              <a:t>5 August 2026</a:t>
             </a:fld>
             <a:endParaRPr lang="en-US"/>
           </a:p>
@@ -19932,7 +20577,7 @@
           <a:p>
             <a:fld id="{334F72C3-CDF3-44A8-B602-1649B1728485}" type="datetime3">
               <a:rPr lang="en-US" smtClean="0"/>
-              <a:t>23 June 2026</a:t>
+              <a:t>5 August 2026</a:t>
             </a:fld>
             <a:endParaRPr lang="en-US"/>
           </a:p>
@@ -20248,7 +20893,7 @@
           <a:p>
             <a:fld id="{1E0132BA-B5E7-4FFD-AF6C-169169D47D4A}" type="datetime3">
               <a:rPr lang="en-US" smtClean="0"/>
-              <a:t>23 June 2026</a:t>
+              <a:t>5 August 2026</a:t>
             </a:fld>
             <a:endParaRPr lang="en-US"/>
           </a:p>
@@ -20741,7 +21386,7 @@
           <a:p>
             <a:fld id="{81A30091-1C2A-4151-8D3C-D1E47A72615F}" type="datetime3">
               <a:rPr lang="en-US" smtClean="0"/>
-              <a:t>23 June 2026</a:t>
+              <a:t>5 August 2026</a:t>
             </a:fld>
             <a:endParaRPr lang="en-US"/>
           </a:p>
@@ -21402,7 +22047,7 @@
           <a:p>
             <a:fld id="{35D703CE-07B4-4C05-A488-B4566700621F}" type="datetime3">
               <a:rPr lang="en-US" smtClean="0"/>
-              <a:t>23 June 2026</a:t>
+              <a:t>5 August 2026</a:t>
             </a:fld>
             <a:endParaRPr lang="en-US"/>
           </a:p>
@@ -22472,7 +23117,7 @@
           <a:p>
             <a:fld id="{694BD61C-20BA-43AF-A21F-1DAFB3200099}" type="datetime3">
               <a:rPr lang="en-US" smtClean="0"/>
-              <a:t>23 June 2026</a:t>
+              <a:t>5 August 2026</a:t>
             </a:fld>
             <a:endParaRPr lang="en-US"/>
           </a:p>
@@ -22959,7 +23604,7 @@
           <a:p>
             <a:fld id="{CABCB1B0-B6E5-4DD1-BB55-95C076D6C0C8}" type="datetime3">
               <a:rPr lang="en-US" smtClean="0"/>
-              <a:t>23 June 2026</a:t>
+              <a:t>5 August 2026</a:t>
             </a:fld>
             <a:endParaRPr lang="en-US"/>
           </a:p>
@@ -25091,7 +25736,7 @@
           <a:p>
             <a:fld id="{334F72C3-CDF3-44A8-B602-1649B1728485}" type="datetime3">
               <a:rPr lang="en-US" smtClean="0"/>
-              <a:t>23 June 2026</a:t>
+              <a:t>5 August 2026</a:t>
             </a:fld>
             <a:endParaRPr lang="en-US"/>
           </a:p>
@@ -26319,7 +26964,7 @@
           <a:p>
             <a:fld id="{334F72C3-CDF3-44A8-B602-1649B1728485}" type="datetime3">
               <a:rPr lang="en-US" smtClean="0"/>
-              <a:t>23 June 2026</a:t>
+              <a:t>5 August 2026</a:t>
             </a:fld>
             <a:endParaRPr lang="en-US"/>
           </a:p>
@@ -26633,7 +27278,7 @@
           <a:p>
             <a:fld id="{334F72C3-CDF3-44A8-B602-1649B1728485}" type="datetime3">
               <a:rPr lang="en-US" smtClean="0"/>
-              <a:t>23 June 2026</a:t>
+              <a:t>5 August 2026</a:t>
             </a:fld>
             <a:endParaRPr lang="en-US"/>
           </a:p>
@@ -26976,7 +27621,7 @@
           <a:p>
             <a:fld id="{AD622D1A-DF83-41A8-85FF-04D90BF831D3}" type="datetime3">
               <a:rPr lang="en-US" smtClean="0"/>
-              <a:t>23 June 2026</a:t>
+              <a:t>5 August 2026</a:t>
             </a:fld>
             <a:endParaRPr lang="en-US"/>
           </a:p>
@@ -27284,7 +27929,7 @@
           <a:p>
             <a:fld id="{334F72C3-CDF3-44A8-B602-1649B1728485}" type="datetime3">
               <a:rPr lang="en-US" smtClean="0"/>
-              <a:t>23 June 2026</a:t>
+              <a:t>5 August 2026</a:t>
             </a:fld>
             <a:endParaRPr lang="en-US"/>
           </a:p>
@@ -28113,7 +28758,7 @@
           <a:p>
             <a:fld id="{334F72C3-CDF3-44A8-B602-1649B1728485}" type="datetime3">
               <a:rPr lang="en-US" smtClean="0"/>
-              <a:t>23 June 2026</a:t>
+              <a:t>5 August 2026</a:t>
             </a:fld>
             <a:endParaRPr lang="en-US"/>
           </a:p>
@@ -28460,7 +29105,7 @@
           <a:p>
             <a:fld id="{334F72C3-CDF3-44A8-B602-1649B1728485}" type="datetime3">
               <a:rPr lang="en-US" smtClean="0"/>
-              <a:t>23 June 2026</a:t>
+              <a:t>5 August 2026</a:t>
             </a:fld>
             <a:endParaRPr lang="en-US"/>
           </a:p>
@@ -29181,7 +29826,7 @@
           <a:p>
             <a:fld id="{AD622D1A-DF83-41A8-85FF-04D90BF831D3}" type="datetime3">
               <a:rPr lang="en-US" smtClean="0"/>
-              <a:t>23 June 2026</a:t>
+              <a:t>5 August 2026</a:t>
             </a:fld>
             <a:endParaRPr lang="en-US"/>
           </a:p>
@@ -29344,7 +29989,7 @@
           <a:p>
             <a:fld id="{D41656AB-D2E1-472E-8B95-0DF5C6E1D623}" type="datetime3">
               <a:rPr lang="en-US" smtClean="0"/>
-              <a:t>23 June 2026</a:t>
+              <a:t>5 August 2026</a:t>
             </a:fld>
             <a:endParaRPr lang="en-US"/>
           </a:p>
@@ -29493,7 +30138,7 @@
           <a:p>
             <a:fld id="{AD622D1A-DF83-41A8-85FF-04D90BF831D3}" type="datetime3">
               <a:rPr lang="en-US" smtClean="0"/>
-              <a:t>23 June 2026</a:t>
+              <a:t>5 August 2026</a:t>
             </a:fld>
             <a:endParaRPr lang="en-US"/>
           </a:p>
@@ -29642,7 +30287,7 @@
           <a:p>
             <a:fld id="{AD622D1A-DF83-41A8-85FF-04D90BF831D3}" type="datetime3">
               <a:rPr lang="en-US" smtClean="0"/>
-              <a:t>23 June 2026</a:t>
+              <a:t>5 August 2026</a:t>
             </a:fld>
             <a:endParaRPr lang="en-US"/>
           </a:p>
@@ -29759,7 +30404,7 @@
           <a:p>
             <a:fld id="{AD622D1A-DF83-41A8-85FF-04D90BF831D3}" type="datetime3">
               <a:rPr lang="en-US" smtClean="0"/>
-              <a:t>23 June 2026</a:t>
+              <a:t>5 August 2026</a:t>
             </a:fld>
             <a:endParaRPr lang="en-US"/>
           </a:p>
@@ -29913,7 +30558,7 @@
           <a:p>
             <a:fld id="{AD622D1A-DF83-41A8-85FF-04D90BF831D3}" type="datetime3">
               <a:rPr lang="en-US" smtClean="0"/>
-              <a:t>23 June 2026</a:t>
+              <a:t>5 August 2026</a:t>
             </a:fld>
             <a:endParaRPr lang="en-US"/>
           </a:p>
@@ -30699,7 +31344,7 @@
           <a:p>
             <a:fld id="{AD622D1A-DF83-41A8-85FF-04D90BF831D3}" type="datetime3">
               <a:rPr lang="en-US" smtClean="0"/>
-              <a:t>23 June 2026</a:t>
+              <a:t>5 August 2026</a:t>
             </a:fld>
             <a:endParaRPr lang="en-US"/>
           </a:p>
@@ -32083,7 +32728,7 @@
           <a:p>
             <a:fld id="{334F72C3-CDF3-44A8-B602-1649B1728485}" type="datetime3">
               <a:rPr lang="en-US" smtClean="0"/>
-              <a:t>23 June 2026</a:t>
+              <a:t>5 August 2026</a:t>
             </a:fld>
             <a:endParaRPr lang="en-US"/>
           </a:p>
@@ -32207,7 +32852,7 @@
           <a:p>
             <a:fld id="{AD622D1A-DF83-41A8-85FF-04D90BF831D3}" type="datetime3">
               <a:rPr lang="en-US" smtClean="0"/>
-              <a:t>23 June 2026</a:t>
+              <a:t>5 August 2026</a:t>
             </a:fld>
             <a:endParaRPr lang="en-US"/>
           </a:p>
@@ -32352,7 +32997,7 @@
           <a:p>
             <a:fld id="{AD622D1A-DF83-41A8-85FF-04D90BF831D3}" type="datetime3">
               <a:rPr lang="en-US" smtClean="0"/>
-              <a:t>23 June 2026</a:t>
+              <a:t>5 August 2026</a:t>
             </a:fld>
             <a:endParaRPr lang="en-US"/>
           </a:p>
@@ -32539,7 +33184,7 @@
           <a:p>
             <a:fld id="{AD622D1A-DF83-41A8-85FF-04D90BF831D3}" type="datetime3">
               <a:rPr lang="en-US" smtClean="0"/>
-              <a:t>23 June 2026</a:t>
+              <a:t>5 August 2026</a:t>
             </a:fld>
             <a:endParaRPr lang="en-US"/>
           </a:p>
@@ -32590,7 +33235,7 @@
           <p:nvPr/>
         </p:nvPicPr>
         <p:blipFill>
-          <a:blip r:embed="rId2">
+          <a:blip r:embed="rId3">
             <a:extLst>
               <a:ext uri="{28A0092B-C50C-407E-A947-70E740481C1C}">
                 <a14:useLocalDpi xmlns:a14="http://schemas.microsoft.com/office/drawing/2010/main" val="0"/>
@@ -33006,7 +33651,7 @@
             <a:fld id="{AD622D1A-DF83-41A8-85FF-04D90BF831D3}" type="datetime3">
               <a:rPr lang="en-US" smtClean="0"/>
               <a:pPr/>
-              <a:t>23 June 2026</a:t>
+              <a:t>5 August 2026</a:t>
             </a:fld>
             <a:endParaRPr lang="en-US"/>
           </a:p>
@@ -33286,7 +33931,7 @@
           <a:p>
             <a:fld id="{AD622D1A-DF83-41A8-85FF-04D90BF831D3}" type="datetime3">
               <a:rPr lang="en-US" smtClean="0"/>
-              <a:t>23 June 2026</a:t>
+              <a:t>5 August 2026</a:t>
             </a:fld>
             <a:endParaRPr lang="en-US"/>
           </a:p>
@@ -33470,7 +34115,7 @@
           <a:p>
             <a:fld id="{AD622D1A-DF83-41A8-85FF-04D90BF831D3}" type="datetime3">
               <a:rPr lang="en-US" smtClean="0"/>
-              <a:t>23 June 2026</a:t>
+              <a:t>5 August 2026</a:t>
             </a:fld>
             <a:endParaRPr lang="en-US"/>
           </a:p>
@@ -33687,7 +34332,11 @@
           </a:p>
           <a:p>
             <a:r>
-              <a:rPr lang="en-US" dirty="0"/>
+              <a:rPr lang="en-US" dirty="0">
+                <a:highlight>
+                  <a:srgbClr val="FFFF00"/>
+                </a:highlight>
+              </a:rPr>
               <a:t>Tests should be complete, independent, reproducible, and small!!</a:t>
             </a:r>
           </a:p>
@@ -33716,7 +34365,7 @@
           <a:p>
             <a:fld id="{AD622D1A-DF83-41A8-85FF-04D90BF831D3}" type="datetime3">
               <a:rPr lang="en-US" smtClean="0"/>
-              <a:t>23 June 2026</a:t>
+              <a:t>5 August 2026</a:t>
             </a:fld>
             <a:endParaRPr lang="en-US"/>
           </a:p>
@@ -33830,7 +34479,7 @@
           <a:p>
             <a:fld id="{AD622D1A-DF83-41A8-85FF-04D90BF831D3}" type="datetime3">
               <a:rPr lang="en-US" smtClean="0"/>
-              <a:t>23 June 2026</a:t>
+              <a:t>5 August 2026</a:t>
             </a:fld>
             <a:endParaRPr lang="en-US"/>
           </a:p>
@@ -33883,7 +34532,7 @@
           </p:nvPr>
         </p:nvPicPr>
         <p:blipFill>
-          <a:blip r:embed="rId2">
+          <a:blip r:embed="rId3">
             <a:extLst>
               <a:ext uri="{28A0092B-C50C-407E-A947-70E740481C1C}">
                 <a14:useLocalDpi xmlns:a14="http://schemas.microsoft.com/office/drawing/2010/main" val="0"/>
